--- a/index/designs/y7-l11/l6-listening-sports/l6-listening-sports.pptx
+++ b/index/designs/y7-l11/l6-listening-sports/l6-listening-sports.pptx
@@ -6618,15 +6618,6 @@
               </a:rPr>
               <a:t>On your paper, write </a:t>
             </a:r>
-            <a:pPr algn="l" indent="0" marL="0">
-              <a:lnSpc>
-                <a:spcPts val="1680"/>
-              </a:lnSpc>
-              <a:spcBef>
-                <a:spcPts val="400"/>
-              </a:spcBef>
-              <a:buNone/>
-            </a:pPr>
             <a:r>
               <a:rPr lang="en-US" sz="1200" b="1" dirty="0">
                 <a:solidFill>
@@ -6638,15 +6629,6 @@
               </a:rPr>
               <a:t>one sentence combining a time and a sport/activity</a:t>
             </a:r>
-            <a:pPr algn="l" indent="0" marL="0">
-              <a:lnSpc>
-                <a:spcPts val="1680"/>
-              </a:lnSpc>
-              <a:spcBef>
-                <a:spcPts val="400"/>
-              </a:spcBef>
-              <a:buNone/>
-            </a:pPr>
             <a:r>
               <a:rPr lang="en-US" sz="1200" dirty="0">
                 <a:solidFill>
@@ -7199,12 +7181,6 @@
               </a:rPr>
               <a:t>Today: </a:t>
             </a:r>
-            <a:pPr algn="ctr" indent="0" marL="0">
-              <a:spcBef>
-                <a:spcPts val="1800"/>
-              </a:spcBef>
-              <a:buNone/>
-            </a:pPr>
             <a:r>
               <a:rPr lang="en-US" sz="1300" b="1" dirty="0">
                 <a:solidFill>
@@ -7216,12 +7192,6 @@
               </a:rPr>
               <a:t>时间 (time) + 活动 (activity)</a:t>
             </a:r>
-            <a:pPr algn="ctr" indent="0" marL="0">
-              <a:spcBef>
-                <a:spcPts val="1800"/>
-              </a:spcBef>
-              <a:buNone/>
-            </a:pPr>
             <a:r>
               <a:rPr lang="en-US" sz="1300" dirty="0">
                 <a:solidFill>
@@ -10327,15 +10297,6 @@
               </a:rPr>
               <a:t>We are learning to </a:t>
             </a:r>
-            <a:pPr algn="l" indent="0" marL="0">
-              <a:lnSpc>
-                <a:spcPts val="2100"/>
-              </a:lnSpc>
-              <a:spcBef>
-                <a:spcPts val="400"/>
-              </a:spcBef>
-              <a:buNone/>
-            </a:pPr>
             <a:r>
               <a:rPr lang="en-US" sz="1500" b="1" dirty="0">
                 <a:solidFill>
@@ -10347,15 +10308,6 @@
               </a:rPr>
               <a:t>listen for a.m./p.m. context</a:t>
             </a:r>
-            <a:pPr algn="l" indent="0" marL="0">
-              <a:lnSpc>
-                <a:spcPts val="2100"/>
-              </a:lnSpc>
-              <a:spcBef>
-                <a:spcPts val="400"/>
-              </a:spcBef>
-              <a:buNone/>
-            </a:pPr>
             <a:r>
               <a:rPr lang="en-US" sz="1500" dirty="0">
                 <a:solidFill>
@@ -10479,9 +10431,6 @@
               </a:rPr>
               <a:t>I can listen and correctly tick whether a time is </a:t>
             </a:r>
-            <a:pPr algn="l" indent="0" marL="0">
-              <a:buNone/>
-            </a:pPr>
             <a:r>
               <a:rPr lang="en-US" sz="1300" b="1" dirty="0">
                 <a:solidFill>
@@ -10647,9 +10596,6 @@
               </a:rPr>
               <a:t>I can make a sentence combining a </a:t>
             </a:r>
-            <a:pPr algn="l" indent="0" marL="0">
-              <a:buNone/>
-            </a:pPr>
             <a:r>
               <a:rPr lang="en-US" sz="1300" b="1" dirty="0">
                 <a:solidFill>
@@ -10661,9 +10607,6 @@
               </a:rPr>
               <a:t>time + an activity</a:t>
             </a:r>
-            <a:pPr algn="l" indent="0" marL="0">
-              <a:buNone/>
-            </a:pPr>
             <a:r>
               <a:rPr lang="en-US" sz="1300" dirty="0">
                 <a:solidFill>
@@ -10829,9 +10772,6 @@
               </a:rPr>
               <a:t>I can spot an </a:t>
             </a:r>
-            <a:pPr algn="l" indent="0" marL="0">
-              <a:buNone/>
-            </a:pPr>
             <a:r>
               <a:rPr lang="en-US" sz="1300" b="1" dirty="0">
                 <a:solidFill>
@@ -10843,9 +10783,6 @@
               </a:rPr>
               <a:t>error</a:t>
             </a:r>
-            <a:pPr algn="l" indent="0" marL="0">
-              <a:buNone/>
-            </a:pPr>
             <a:r>
               <a:rPr lang="en-US" sz="1300" dirty="0">
                 <a:solidFill>
@@ -11221,9 +11158,6 @@
               </a:rPr>
               <a:t>看书</a:t>
             </a:r>
-            <a:pPr algn="l" indent="0" marL="0">
-              <a:buNone/>
-            </a:pPr>
             <a:r>
               <a:rPr lang="en-US" sz="1200" dirty="0">
                 <a:solidFill>
@@ -11235,9 +11169,6 @@
               </a:rPr>
               <a:t> </a:t>
             </a:r>
-            <a:pPr algn="l" indent="0" marL="0">
-              <a:buNone/>
-            </a:pPr>
             <a:r>
               <a:rPr lang="en-US" sz="1200" dirty="0">
                 <a:solidFill>
@@ -11249,9 +11180,6 @@
               </a:rPr>
               <a:t>kàn shū</a:t>
             </a:r>
-            <a:pPr algn="l" indent="0" marL="0">
-              <a:buNone/>
-            </a:pPr>
             <a:r>
               <a:rPr lang="en-US" sz="1200" dirty="0">
                 <a:solidFill>
@@ -11263,9 +11191,6 @@
               </a:rPr>
               <a:t> </a:t>
             </a:r>
-            <a:pPr algn="l" indent="0" marL="0">
-              <a:buNone/>
-            </a:pPr>
             <a:r>
               <a:rPr lang="en-US" sz="1200" dirty="0">
                 <a:solidFill>
@@ -11294,9 +11219,6 @@
               </a:rPr>
               <a:t>游泳</a:t>
             </a:r>
-            <a:pPr algn="l" indent="0" marL="0">
-              <a:buNone/>
-            </a:pPr>
             <a:r>
               <a:rPr lang="en-US" sz="1200" dirty="0">
                 <a:solidFill>
@@ -11308,9 +11230,6 @@
               </a:rPr>
               <a:t> </a:t>
             </a:r>
-            <a:pPr algn="l" indent="0" marL="0">
-              <a:buNone/>
-            </a:pPr>
             <a:r>
               <a:rPr lang="en-US" sz="1200" dirty="0">
                 <a:solidFill>
@@ -11322,9 +11241,6 @@
               </a:rPr>
               <a:t>yóu yǒng</a:t>
             </a:r>
-            <a:pPr algn="l" indent="0" marL="0">
-              <a:buNone/>
-            </a:pPr>
             <a:r>
               <a:rPr lang="en-US" sz="1200" dirty="0">
                 <a:solidFill>
@@ -11336,9 +11252,6 @@
               </a:rPr>
               <a:t> </a:t>
             </a:r>
-            <a:pPr algn="l" indent="0" marL="0">
-              <a:buNone/>
-            </a:pPr>
             <a:r>
               <a:rPr lang="en-US" sz="1200" dirty="0">
                 <a:solidFill>
@@ -11367,9 +11280,6 @@
               </a:rPr>
               <a:t>打篮球</a:t>
             </a:r>
-            <a:pPr algn="l" indent="0" marL="0">
-              <a:buNone/>
-            </a:pPr>
             <a:r>
               <a:rPr lang="en-US" sz="1200" dirty="0">
                 <a:solidFill>
@@ -11381,9 +11291,6 @@
               </a:rPr>
               <a:t> </a:t>
             </a:r>
-            <a:pPr algn="l" indent="0" marL="0">
-              <a:buNone/>
-            </a:pPr>
             <a:r>
               <a:rPr lang="en-US" sz="1200" dirty="0">
                 <a:solidFill>
@@ -11395,9 +11302,6 @@
               </a:rPr>
               <a:t>dǎ lán qiú</a:t>
             </a:r>
-            <a:pPr algn="l" indent="0" marL="0">
-              <a:buNone/>
-            </a:pPr>
             <a:r>
               <a:rPr lang="en-US" sz="1200" dirty="0">
                 <a:solidFill>
@@ -11409,9 +11313,6 @@
               </a:rPr>
               <a:t> </a:t>
             </a:r>
-            <a:pPr algn="l" indent="0" marL="0">
-              <a:buNone/>
-            </a:pPr>
             <a:r>
               <a:rPr lang="en-US" sz="1200" dirty="0">
                 <a:solidFill>
@@ -11440,9 +11341,6 @@
               </a:rPr>
               <a:t>踢澳大利亚足球</a:t>
             </a:r>
-            <a:pPr algn="l" indent="0" marL="0">
-              <a:buNone/>
-            </a:pPr>
             <a:r>
               <a:rPr lang="en-US" sz="1200" dirty="0">
                 <a:solidFill>
@@ -11454,9 +11352,6 @@
               </a:rPr>
               <a:t> </a:t>
             </a:r>
-            <a:pPr algn="l" indent="0" marL="0">
-              <a:buNone/>
-            </a:pPr>
             <a:r>
               <a:rPr lang="en-US" sz="1200" dirty="0">
                 <a:solidFill>
@@ -11468,9 +11363,6 @@
               </a:rPr>
               <a:t>tī àodàlìyà zúqiú</a:t>
             </a:r>
-            <a:pPr algn="l" indent="0" marL="0">
-              <a:buNone/>
-            </a:pPr>
             <a:r>
               <a:rPr lang="en-US" sz="1200" dirty="0">
                 <a:solidFill>
@@ -11482,9 +11374,6 @@
               </a:rPr>
               <a:t> </a:t>
             </a:r>
-            <a:pPr algn="l" indent="0" marL="0">
-              <a:buNone/>
-            </a:pPr>
             <a:r>
               <a:rPr lang="en-US" sz="1200" dirty="0">
                 <a:solidFill>
@@ -11513,9 +11402,6 @@
               </a:rPr>
               <a:t>打棒球</a:t>
             </a:r>
-            <a:pPr algn="l" indent="0" marL="0">
-              <a:buNone/>
-            </a:pPr>
             <a:r>
               <a:rPr lang="en-US" sz="1200" dirty="0">
                 <a:solidFill>
@@ -11527,9 +11413,6 @@
               </a:rPr>
               <a:t> </a:t>
             </a:r>
-            <a:pPr algn="l" indent="0" marL="0">
-              <a:buNone/>
-            </a:pPr>
             <a:r>
               <a:rPr lang="en-US" sz="1200" dirty="0">
                 <a:solidFill>
@@ -11541,9 +11424,6 @@
               </a:rPr>
               <a:t>dǎ bàng qiú</a:t>
             </a:r>
-            <a:pPr algn="l" indent="0" marL="0">
-              <a:buNone/>
-            </a:pPr>
             <a:r>
               <a:rPr lang="en-US" sz="1200" dirty="0">
                 <a:solidFill>
@@ -11555,9 +11435,6 @@
               </a:rPr>
               <a:t> </a:t>
             </a:r>
-            <a:pPr algn="l" indent="0" marL="0">
-              <a:buNone/>
-            </a:pPr>
             <a:r>
               <a:rPr lang="en-US" sz="1200" dirty="0">
                 <a:solidFill>
@@ -11640,9 +11517,6 @@
               </a:rPr>
               <a:t>打板球</a:t>
             </a:r>
-            <a:pPr algn="l" indent="0" marL="0">
-              <a:buNone/>
-            </a:pPr>
             <a:r>
               <a:rPr lang="en-US" sz="1200" dirty="0">
                 <a:solidFill>
@@ -11654,9 +11528,6 @@
               </a:rPr>
               <a:t> </a:t>
             </a:r>
-            <a:pPr algn="l" indent="0" marL="0">
-              <a:buNone/>
-            </a:pPr>
             <a:r>
               <a:rPr lang="en-US" sz="1200" dirty="0">
                 <a:solidFill>
@@ -11668,9 +11539,6 @@
               </a:rPr>
               <a:t>dǎ bǎn qiú</a:t>
             </a:r>
-            <a:pPr algn="l" indent="0" marL="0">
-              <a:buNone/>
-            </a:pPr>
             <a:r>
               <a:rPr lang="en-US" sz="1200" dirty="0">
                 <a:solidFill>
@@ -11682,9 +11550,6 @@
               </a:rPr>
               <a:t> </a:t>
             </a:r>
-            <a:pPr algn="l" indent="0" marL="0">
-              <a:buNone/>
-            </a:pPr>
             <a:r>
               <a:rPr lang="en-US" sz="1200" dirty="0">
                 <a:solidFill>
@@ -11713,9 +11578,6 @@
               </a:rPr>
               <a:t>打乒乓球</a:t>
             </a:r>
-            <a:pPr algn="l" indent="0" marL="0">
-              <a:buNone/>
-            </a:pPr>
             <a:r>
               <a:rPr lang="en-US" sz="1200" dirty="0">
                 <a:solidFill>
@@ -11727,9 +11589,6 @@
               </a:rPr>
               <a:t> </a:t>
             </a:r>
-            <a:pPr algn="l" indent="0" marL="0">
-              <a:buNone/>
-            </a:pPr>
             <a:r>
               <a:rPr lang="en-US" sz="1200" dirty="0">
                 <a:solidFill>
@@ -11741,9 +11600,6 @@
               </a:rPr>
               <a:t>dǎ pīngpāng qiú</a:t>
             </a:r>
-            <a:pPr algn="l" indent="0" marL="0">
-              <a:buNone/>
-            </a:pPr>
             <a:r>
               <a:rPr lang="en-US" sz="1200" dirty="0">
                 <a:solidFill>
@@ -11755,9 +11611,6 @@
               </a:rPr>
               <a:t> </a:t>
             </a:r>
-            <a:pPr algn="l" indent="0" marL="0">
-              <a:buNone/>
-            </a:pPr>
             <a:r>
               <a:rPr lang="en-US" sz="1200" dirty="0">
                 <a:solidFill>
@@ -11786,9 +11639,6 @@
               </a:rPr>
               <a:t>打羽毛球</a:t>
             </a:r>
-            <a:pPr algn="l" indent="0" marL="0">
-              <a:buNone/>
-            </a:pPr>
             <a:r>
               <a:rPr lang="en-US" sz="1200" dirty="0">
                 <a:solidFill>
@@ -11800,9 +11650,6 @@
               </a:rPr>
               <a:t> </a:t>
             </a:r>
-            <a:pPr algn="l" indent="0" marL="0">
-              <a:buNone/>
-            </a:pPr>
             <a:r>
               <a:rPr lang="en-US" sz="1200" dirty="0">
                 <a:solidFill>
@@ -11814,9 +11661,6 @@
               </a:rPr>
               <a:t>dǎ yǔmáo qiú</a:t>
             </a:r>
-            <a:pPr algn="l" indent="0" marL="0">
-              <a:buNone/>
-            </a:pPr>
             <a:r>
               <a:rPr lang="en-US" sz="1200" dirty="0">
                 <a:solidFill>
@@ -11828,9 +11672,6 @@
               </a:rPr>
               <a:t> </a:t>
             </a:r>
-            <a:pPr algn="l" indent="0" marL="0">
-              <a:buNone/>
-            </a:pPr>
             <a:r>
               <a:rPr lang="en-US" sz="1200" dirty="0">
                 <a:solidFill>
@@ -11859,9 +11700,6 @@
               </a:rPr>
               <a:t>打网球</a:t>
             </a:r>
-            <a:pPr algn="l" indent="0" marL="0">
-              <a:buNone/>
-            </a:pPr>
             <a:r>
               <a:rPr lang="en-US" sz="1200" dirty="0">
                 <a:solidFill>
@@ -11873,9 +11711,6 @@
               </a:rPr>
               <a:t> </a:t>
             </a:r>
-            <a:pPr algn="l" indent="0" marL="0">
-              <a:buNone/>
-            </a:pPr>
             <a:r>
               <a:rPr lang="en-US" sz="1200" dirty="0">
                 <a:solidFill>
@@ -11887,9 +11722,6 @@
               </a:rPr>
               <a:t>dǎ wǎng qiú</a:t>
             </a:r>
-            <a:pPr algn="l" indent="0" marL="0">
-              <a:buNone/>
-            </a:pPr>
             <a:r>
               <a:rPr lang="en-US" sz="1200" dirty="0">
                 <a:solidFill>
@@ -11901,9 +11733,6 @@
               </a:rPr>
               <a:t> </a:t>
             </a:r>
-            <a:pPr algn="l" indent="0" marL="0">
-              <a:buNone/>
-            </a:pPr>
             <a:r>
               <a:rPr lang="en-US" sz="1200" dirty="0">
                 <a:solidFill>
@@ -11932,9 +11761,6 @@
               </a:rPr>
               <a:t>做作业</a:t>
             </a:r>
-            <a:pPr algn="l" indent="0" marL="0">
-              <a:buNone/>
-            </a:pPr>
             <a:r>
               <a:rPr lang="en-US" sz="1200" dirty="0">
                 <a:solidFill>
@@ -11946,9 +11772,6 @@
               </a:rPr>
               <a:t> </a:t>
             </a:r>
-            <a:pPr algn="l" indent="0" marL="0">
-              <a:buNone/>
-            </a:pPr>
             <a:r>
               <a:rPr lang="en-US" sz="1200" dirty="0">
                 <a:solidFill>
@@ -11960,9 +11783,6 @@
               </a:rPr>
               <a:t>zuò zuòyè</a:t>
             </a:r>
-            <a:pPr algn="l" indent="0" marL="0">
-              <a:buNone/>
-            </a:pPr>
             <a:r>
               <a:rPr lang="en-US" sz="1200" dirty="0">
                 <a:solidFill>
@@ -11974,9 +11794,6 @@
               </a:rPr>
               <a:t> </a:t>
             </a:r>
-            <a:pPr algn="l" indent="0" marL="0">
-              <a:buNone/>
-            </a:pPr>
             <a:r>
               <a:rPr lang="en-US" sz="1200" dirty="0">
                 <a:solidFill>
@@ -12101,12 +11918,6 @@
               </a:rPr>
               <a:t>Most ball sports use </a:t>
             </a:r>
-            <a:pPr algn="l" indent="0" marL="0">
-              <a:spcBef>
-                <a:spcPts val="200"/>
-              </a:spcBef>
-              <a:buNone/>
-            </a:pPr>
             <a:r>
               <a:rPr lang="en-US" sz="1100" b="1" dirty="0">
                 <a:solidFill>
@@ -12118,12 +11929,6 @@
               </a:rPr>
               <a:t>打 + ball name</a:t>
             </a:r>
-            <a:pPr algn="l" indent="0" marL="0">
-              <a:spcBef>
-                <a:spcPts val="200"/>
-              </a:spcBef>
-              <a:buNone/>
-            </a:pPr>
             <a:r>
               <a:rPr lang="en-US" sz="1100" dirty="0">
                 <a:solidFill>
@@ -13042,9 +12847,6 @@
               </a:rPr>
               <a:t>我</a:t>
             </a:r>
-            <a:pPr algn="l" indent="0" marL="0">
-              <a:buNone/>
-            </a:pPr>
             <a:r>
               <a:rPr lang="en-US" sz="1900" b="1" dirty="0">
                 <a:solidFill>
@@ -13056,9 +12858,6 @@
               </a:rPr>
               <a:t>下午四点</a:t>
             </a:r>
-            <a:pPr algn="l" indent="0" marL="0">
-              <a:buNone/>
-            </a:pPr>
             <a:r>
               <a:rPr lang="en-US" sz="1900" b="1" dirty="0">
                 <a:solidFill>
@@ -13070,9 +12869,6 @@
               </a:rPr>
               <a:t>打篮球</a:t>
             </a:r>
-            <a:pPr algn="l" indent="0" marL="0">
-              <a:buNone/>
-            </a:pPr>
             <a:r>
               <a:rPr lang="en-US" sz="1900" dirty="0">
                 <a:solidFill>
@@ -13197,9 +12993,6 @@
               </a:rPr>
               <a:t>我</a:t>
             </a:r>
-            <a:pPr algn="l" indent="0" marL="0">
-              <a:buNone/>
-            </a:pPr>
             <a:r>
               <a:rPr lang="en-US" sz="1900" b="1" dirty="0">
                 <a:solidFill>
@@ -13211,9 +13004,6 @@
               </a:rPr>
               <a:t>晚上八点</a:t>
             </a:r>
-            <a:pPr algn="l" indent="0" marL="0">
-              <a:buNone/>
-            </a:pPr>
             <a:r>
               <a:rPr lang="en-US" sz="1900" b="1" dirty="0">
                 <a:solidFill>
@@ -13225,9 +13015,6 @@
               </a:rPr>
               <a:t>做作业</a:t>
             </a:r>
-            <a:pPr algn="l" indent="0" marL="0">
-              <a:buNone/>
-            </a:pPr>
             <a:r>
               <a:rPr lang="en-US" sz="1900" dirty="0">
                 <a:solidFill>
@@ -13394,12 +13181,6 @@
               </a:rPr>
               <a:t>Sports verbs slot into the </a:t>
             </a:r>
-            <a:pPr algn="l" indent="0" marL="0">
-              <a:spcBef>
-                <a:spcPts val="200"/>
-              </a:spcBef>
-              <a:buNone/>
-            </a:pPr>
             <a:r>
               <a:rPr lang="en-US" sz="1200" b="1" dirty="0">
                 <a:solidFill>
@@ -13411,12 +13192,6 @@
               </a:rPr>
               <a:t>exact same position</a:t>
             </a:r>
-            <a:pPr algn="l" indent="0" marL="0">
-              <a:spcBef>
-                <a:spcPts val="200"/>
-              </a:spcBef>
-              <a:buNone/>
-            </a:pPr>
             <a:r>
               <a:rPr lang="en-US" sz="1200" dirty="0">
                 <a:solidFill>
@@ -13789,9 +13564,6 @@
               </a:rPr>
               <a:t>「我下午四点半___。」Fill in a </a:t>
             </a:r>
-            <a:pPr algn="l" indent="0" marL="0">
-              <a:buNone/>
-            </a:pPr>
             <a:r>
               <a:rPr lang="en-US" sz="1300" b="1" dirty="0">
                 <a:solidFill>
@@ -13803,9 +13575,6 @@
               </a:rPr>
               <a:t>sports activity</a:t>
             </a:r>
-            <a:pPr algn="l" indent="0" marL="0">
-              <a:buNone/>
-            </a:pPr>
             <a:r>
               <a:rPr lang="en-US" sz="1300" dirty="0">
                 <a:solidFill>
@@ -13927,9 +13696,6 @@
               </a:rPr>
               <a:t>「我晚上七点游泳。」Is this a likely sentence — or should we picture-check it? </a:t>
             </a:r>
-            <a:pPr algn="l" indent="0" marL="0">
-              <a:buNone/>
-            </a:pPr>
             <a:r>
               <a:rPr lang="en-US" sz="1300" i="1" dirty="0">
                 <a:solidFill>
@@ -14051,9 +13817,6 @@
               </a:rPr>
               <a:t>Teacher says a time + activity sentence. </a:t>
             </a:r>
-            <a:pPr algn="l" indent="0" marL="0">
-              <a:buNone/>
-            </a:pPr>
             <a:r>
               <a:rPr lang="en-US" sz="1300" b="1" dirty="0">
                 <a:solidFill>
@@ -14065,9 +13828,6 @@
               </a:rPr>
               <a:t>👍</a:t>
             </a:r>
-            <a:pPr algn="l" indent="0" marL="0">
-              <a:buNone/>
-            </a:pPr>
             <a:r>
               <a:rPr lang="en-US" sz="1300" dirty="0">
                 <a:solidFill>
@@ -14079,9 +13839,6 @@
               </a:rPr>
               <a:t> if it makes logical sense, </a:t>
             </a:r>
-            <a:pPr algn="l" indent="0" marL="0">
-              <a:buNone/>
-            </a:pPr>
             <a:r>
               <a:rPr lang="en-US" sz="1300" b="1" dirty="0">
                 <a:solidFill>
@@ -14093,9 +13850,6 @@
               </a:rPr>
               <a:t>👎</a:t>
             </a:r>
-            <a:pPr algn="l" indent="0" marL="0">
-              <a:buNone/>
-            </a:pPr>
             <a:r>
               <a:rPr lang="en-US" sz="1300" dirty="0">
                 <a:solidFill>
